--- a/public/resources/pptx/pre-english-s5.pptx
+++ b/public/resources/pptx/pre-english-s5.pptx
@@ -5363,7 +5363,7 @@
                 </a:solidFill>
                 <a:latin typeface="Calibri"/>
               </a:rPr>
-              <a:t>Insert a short clip introducing the animals students will observe today.
+              <a:t>Insert a short clip introducing the animals students will observe on the excursion.
 Suggested: Taronga keeper video, National Geographic clip, or animal documentary excerpt.
 Aim for 2–4 minutes — pause at key moments to discuss.</a:t>
             </a:r>
